--- a/day2-deck/decks/Most Improved - Review.pptx
+++ b/day2-deck/decks/Most Improved - Review.pptx
@@ -5270,8 +5270,8 @@
         </p:nvSpPr>
         <p:spPr>
           <a:xfrm>
-            <a:off x="457200" y="5961888"/>
-            <a:ext cx="11274552" cy="548640"/>
+            <a:off x="457200" y="6126480"/>
+            <a:ext cx="11274552" cy="371856"/>
           </a:xfrm>
           <a:prstGeom prst="rect">
             <a:avLst/>
@@ -5290,8 +5290,8 @@
         </p:nvSpPr>
         <p:spPr>
           <a:xfrm>
-            <a:off x="658368" y="5980176"/>
-            <a:ext cx="10927080" cy="512064"/>
+            <a:off x="658368" y="6144768"/>
+            <a:ext cx="10927080" cy="335280"/>
           </a:xfrm>
           <a:prstGeom prst="rect">
             <a:avLst/>
@@ -5315,7 +5315,7 @@
                 <a:ea typeface="Inter" pitchFamily="34" charset="-122"/>
                 <a:cs typeface="Inter" pitchFamily="34" charset="-120"/>
               </a:rPr>
-              <a:t>LINCOLN makes three of six lists; three stores make two.</a:t>
+              <a:t>Lincoln makes three of six lists; three stores make two.</a:t>
             </a:r>
             <a:endParaRPr lang="en-US" sz="1600" dirty="0"/>
           </a:p>
@@ -9034,8 +9034,8 @@
         </p:nvSpPr>
         <p:spPr>
           <a:xfrm>
-            <a:off x="457200" y="5961888"/>
-            <a:ext cx="11274552" cy="548640"/>
+            <a:off x="457200" y="6126480"/>
+            <a:ext cx="11274552" cy="371856"/>
           </a:xfrm>
           <a:prstGeom prst="rect">
             <a:avLst/>
@@ -9054,8 +9054,8 @@
         </p:nvSpPr>
         <p:spPr>
           <a:xfrm>
-            <a:off x="658368" y="5980176"/>
-            <a:ext cx="10927080" cy="512064"/>
+            <a:off x="658368" y="6144768"/>
+            <a:ext cx="10927080" cy="335280"/>
           </a:xfrm>
           <a:prstGeom prst="rect">
             <a:avLst/>
@@ -9079,7 +9079,7 @@
                 <a:ea typeface="Inter" pitchFamily="34" charset="-122"/>
                 <a:cs typeface="Inter" pitchFamily="34" charset="-120"/>
               </a:rPr>
-              <a:t>LINCOLN and KIA ST GEORGE each make three of six lists.</a:t>
+              <a:t>Lincoln and Kia St George each make three of six lists.</a:t>
             </a:r>
             <a:endParaRPr lang="en-US" sz="1600" dirty="0"/>
           </a:p>
@@ -10848,8 +10848,8 @@
         </p:nvSpPr>
         <p:spPr>
           <a:xfrm>
-            <a:off x="457200" y="5961888"/>
-            <a:ext cx="11274552" cy="548640"/>
+            <a:off x="457200" y="6126480"/>
+            <a:ext cx="11274552" cy="371856"/>
           </a:xfrm>
           <a:prstGeom prst="rect">
             <a:avLst/>
@@ -10868,8 +10868,8 @@
         </p:nvSpPr>
         <p:spPr>
           <a:xfrm>
-            <a:off x="658368" y="5980176"/>
-            <a:ext cx="10927080" cy="512064"/>
+            <a:off x="658368" y="6144768"/>
+            <a:ext cx="10927080" cy="335280"/>
           </a:xfrm>
           <a:prstGeom prst="rect">
             <a:avLst/>
@@ -10893,7 +10893,7 @@
                 <a:ea typeface="Inter" pitchFamily="34" charset="-122"/>
                 <a:cs typeface="Inter" pitchFamily="34" charset="-120"/>
               </a:rPr>
-              <a:t>LINCOLN has 6 top-3 finishes of 12. 8 stores make a top-3 list in both periods.</a:t>
+              <a:t>Lincoln has 6 top-3 finishes of 12. 8 stores make a top-3 list in both periods.</a:t>
             </a:r>
             <a:endParaRPr lang="en-US" sz="1600" dirty="0"/>
           </a:p>
@@ -13153,8 +13153,8 @@
         </p:nvSpPr>
         <p:spPr>
           <a:xfrm>
-            <a:off x="457200" y="5961888"/>
-            <a:ext cx="11274552" cy="548640"/>
+            <a:off x="457200" y="6126480"/>
+            <a:ext cx="11274552" cy="371856"/>
           </a:xfrm>
           <a:prstGeom prst="rect">
             <a:avLst/>
@@ -13173,8 +13173,8 @@
         </p:nvSpPr>
         <p:spPr>
           <a:xfrm>
-            <a:off x="658368" y="5980176"/>
-            <a:ext cx="10927080" cy="512064"/>
+            <a:off x="658368" y="6144768"/>
+            <a:ext cx="10927080" cy="335280"/>
           </a:xfrm>
           <a:prstGeom prst="rect">
             <a:avLst/>
@@ -13198,7 +13198,7 @@
                 <a:ea typeface="Inter" pitchFamily="34" charset="-122"/>
                 <a:cs typeface="Inter" pitchFamily="34" charset="-120"/>
               </a:rPr>
-              <a:t>LINCOLN leads both periods. Three stores are top five in both.</a:t>
+              <a:t>Lincoln leads both periods. Three stores are top five in both.</a:t>
             </a:r>
             <a:endParaRPr lang="en-US" sz="1600" dirty="0"/>
           </a:p>
@@ -15458,8 +15458,8 @@
         </p:nvSpPr>
         <p:spPr>
           <a:xfrm>
-            <a:off x="457200" y="5961888"/>
-            <a:ext cx="11274552" cy="548640"/>
+            <a:off x="457200" y="6126480"/>
+            <a:ext cx="11274552" cy="371856"/>
           </a:xfrm>
           <a:prstGeom prst="rect">
             <a:avLst/>
@@ -15478,8 +15478,8 @@
         </p:nvSpPr>
         <p:spPr>
           <a:xfrm>
-            <a:off x="658368" y="5980176"/>
-            <a:ext cx="10927080" cy="512064"/>
+            <a:off x="658368" y="6144768"/>
+            <a:ext cx="10927080" cy="335280"/>
           </a:xfrm>
           <a:prstGeom prst="rect">
             <a:avLst/>
@@ -15503,7 +15503,7 @@
                 <a:ea typeface="Inter" pitchFamily="34" charset="-122"/>
                 <a:cs typeface="Inter" pitchFamily="34" charset="-120"/>
               </a:rPr>
-              <a:t>KIA LV leads Jan–Sep; LR RENO leads the last 90 days. Three stores are top five in both.</a:t>
+              <a:t>Kia LV leads Jan–Sep; LR Reno leads the last 90 days. Three stores are top five in both.</a:t>
             </a:r>
             <a:endParaRPr lang="en-US" sz="1600" dirty="0"/>
           </a:p>
@@ -17763,8 +17763,8 @@
         </p:nvSpPr>
         <p:spPr>
           <a:xfrm>
-            <a:off x="457200" y="5961888"/>
-            <a:ext cx="11274552" cy="548640"/>
+            <a:off x="457200" y="6126480"/>
+            <a:ext cx="11274552" cy="371856"/>
           </a:xfrm>
           <a:prstGeom prst="rect">
             <a:avLst/>
@@ -17783,8 +17783,8 @@
         </p:nvSpPr>
         <p:spPr>
           <a:xfrm>
-            <a:off x="658368" y="5980176"/>
-            <a:ext cx="10927080" cy="512064"/>
+            <a:off x="658368" y="6144768"/>
+            <a:ext cx="10927080" cy="335280"/>
           </a:xfrm>
           <a:prstGeom prst="rect">
             <a:avLst/>
@@ -17808,7 +17808,7 @@
                 <a:ea typeface="Inter" pitchFamily="34" charset="-122"/>
                 <a:cs typeface="Inter" pitchFamily="34" charset="-120"/>
               </a:rPr>
-              <a:t>HYUNDAI ST GEORGE leads both periods. HYUNDAI ST GEORGE and KIA ST GEORGE are top five in both.</a:t>
+              <a:t>Hyundai St George leads both periods. Hyundai St George and Kia St George are top five in both.</a:t>
             </a:r>
             <a:endParaRPr lang="en-US" sz="1600" dirty="0"/>
           </a:p>
@@ -20068,8 +20068,8 @@
         </p:nvSpPr>
         <p:spPr>
           <a:xfrm>
-            <a:off x="457200" y="5961888"/>
-            <a:ext cx="11274552" cy="548640"/>
+            <a:off x="457200" y="6126480"/>
+            <a:ext cx="11274552" cy="371856"/>
           </a:xfrm>
           <a:prstGeom prst="rect">
             <a:avLst/>
@@ -20088,8 +20088,8 @@
         </p:nvSpPr>
         <p:spPr>
           <a:xfrm>
-            <a:off x="658368" y="5980176"/>
-            <a:ext cx="10927080" cy="512064"/>
+            <a:off x="658368" y="6144768"/>
+            <a:ext cx="10927080" cy="335280"/>
           </a:xfrm>
           <a:prstGeom prst="rect">
             <a:avLst/>
@@ -20113,7 +20113,7 @@
                 <a:ea typeface="Inter" pitchFamily="34" charset="-122"/>
                 <a:cs typeface="Inter" pitchFamily="34" charset="-120"/>
               </a:rPr>
-              <a:t>HONDA SPOKANE leads Jan–Sep; LINCOLN leads the last 90 days. Five stores are top five in both.</a:t>
+              <a:t>Honda Spokane leads Jan–Sep; Lincoln leads the last 90 days. Five stores are top five in both.</a:t>
             </a:r>
             <a:endParaRPr lang="en-US" sz="1600" dirty="0"/>
           </a:p>
@@ -22373,8 +22373,8 @@
         </p:nvSpPr>
         <p:spPr>
           <a:xfrm>
-            <a:off x="457200" y="5961888"/>
-            <a:ext cx="11274552" cy="548640"/>
+            <a:off x="457200" y="6126480"/>
+            <a:ext cx="11274552" cy="371856"/>
           </a:xfrm>
           <a:prstGeom prst="rect">
             <a:avLst/>
@@ -22393,8 +22393,8 @@
         </p:nvSpPr>
         <p:spPr>
           <a:xfrm>
-            <a:off x="658368" y="5980176"/>
-            <a:ext cx="10927080" cy="512064"/>
+            <a:off x="658368" y="6144768"/>
+            <a:ext cx="10927080" cy="335280"/>
           </a:xfrm>
           <a:prstGeom prst="rect">
             <a:avLst/>
@@ -22418,7 +22418,7 @@
                 <a:ea typeface="Inter" pitchFamily="34" charset="-122"/>
                 <a:cs typeface="Inter" pitchFamily="34" charset="-120"/>
               </a:rPr>
-              <a:t>LINCOLN leads both periods. Three stores are top five in both.</a:t>
+              <a:t>Lincoln leads both periods. Three stores are top five in both.</a:t>
             </a:r>
             <a:endParaRPr lang="en-US" sz="1600" dirty="0"/>
           </a:p>
@@ -24678,8 +24678,8 @@
         </p:nvSpPr>
         <p:spPr>
           <a:xfrm>
-            <a:off x="457200" y="5961888"/>
-            <a:ext cx="11274552" cy="548640"/>
+            <a:off x="457200" y="6126480"/>
+            <a:ext cx="11274552" cy="371856"/>
           </a:xfrm>
           <a:prstGeom prst="rect">
             <a:avLst/>
@@ -24698,8 +24698,8 @@
         </p:nvSpPr>
         <p:spPr>
           <a:xfrm>
-            <a:off x="658368" y="5980176"/>
-            <a:ext cx="10927080" cy="512064"/>
+            <a:off x="658368" y="6144768"/>
+            <a:ext cx="10927080" cy="335280"/>
           </a:xfrm>
           <a:prstGeom prst="rect">
             <a:avLst/>
@@ -24723,7 +24723,7 @@
                 <a:ea typeface="Inter" pitchFamily="34" charset="-122"/>
                 <a:cs typeface="Inter" pitchFamily="34" charset="-120"/>
               </a:rPr>
-              <a:t>ACURA leads both periods. ACURA and SUBARU PRESCOTT are top five in both.</a:t>
+              <a:t>Acura leads both periods. Acura and Subaru Prescott are top five in both.</a:t>
             </a:r>
             <a:endParaRPr lang="en-US" sz="1600" dirty="0"/>
           </a:p>

--- a/day2-deck/decks/Most Improved - Review.pptx
+++ b/day2-deck/decks/Most Improved - Review.pptx
@@ -510,7 +510,7 @@
           <a:p>
             <a:r>
               <a:rPr lang="en-US" dirty="0"/>
-              <a:t>Source: Qlik - Closed Repair Orders. Customer pay, by close date. Same-store, 33 stores (INEOS excluded, opened 2026). GMC Prescott body shop labor types excluded. Change is 2026 vs the same months of 2025, so seasonality cancels out. Stores ranked by percent change (points for parts GP %), so store size does not drive the ranking. CP gross = CP labor gross + CP parts gross. Period: Jan–Sep 2026 vs Jan–Sep 2025. Stores with under 50 CP ROs in the base period not ranked (none were excluded).
+              <a:t>Takeaway (off the slide): Lincoln makes three of six lists; three stores make two.Source: Qlik - Closed Repair Orders. Customer pay, by close date. Same-store, 33 stores (INEOS excluded, opened 2026). GMC Prescott body shop labor types excluded. Change is 2026 vs the same months of 2025, so seasonality cancels out. Stores ranked by percent change (points for parts GP %), so store size does not drive the ranking. CP gross = CP labor gross + CP parts gross. Period: Jan–Sep 2026 vs Jan–Sep 2025. Stores with under 50 CP ROs in the base period not ranked (none were excluded).
 Review note: percent change rewards a store coming off a weak base. The before → after values are on the card so the room sees the starting point.</a:t>
             </a:r>
             <a:endParaRPr lang="en-US" dirty="0"/>
@@ -599,7 +599,7 @@
           <a:p>
             <a:r>
               <a:rPr lang="en-US" dirty="0"/>
-              <a:t>Source: Qlik - Closed Repair Orders. Customer pay, by close date. Same-store, 33 stores (INEOS excluded, opened 2026). GMC Prescott body shop labor types excluded. Change is 2026 vs the same months of 2025, so seasonality cancels out. Stores ranked by percent change (points for parts GP %), so store size does not drive the ranking. CP gross = CP labor gross + CP parts gross. Period: Jul–Sep 2026 vs Jul–Sep 2025. Stores with under 50 CP ROs in the base period not ranked (none were excluded).
+              <a:t>Takeaway (off the slide): Lincoln and Kia St George each make three of six lists.Source: Qlik - Closed Repair Orders. Customer pay, by close date. Same-store, 33 stores (INEOS excluded, opened 2026). GMC Prescott body shop labor types excluded. Change is 2026 vs the same months of 2025, so seasonality cancels out. Stores ranked by percent change (points for parts GP %), so store size does not drive the ranking. CP gross = CP labor gross + CP parts gross. Period: Jul–Sep 2026 vs Jul–Sep 2025. Stores with under 50 CP ROs in the base period not ranked (none were excluded).
 Review note: percent change rewards a store coming off a weak base. The before → after values are on the card so the room sees the starting point.</a:t>
             </a:r>
             <a:endParaRPr lang="en-US" dirty="0"/>
@@ -688,7 +688,7 @@
           <a:p>
             <a:r>
               <a:rPr lang="en-US" dirty="0"/>
-              <a:t>Source: Qlik - Closed Repair Orders. Customer pay, by close date. Same-store, 33 stores (INEOS excluded, opened 2026). GMC Prescott body shop labor types excluded. Change is 2026 vs the same months of 2025, so seasonality cancels out. Stores ranked by percent change (points for parts GP %), so store size does not drive the ranking. CP gross = CP labor gross + CP parts gross. Top-3 finishes counted across six measures in each of two periods (Jan-Sep and Jul-Sep), 12 lists in all. Top 8 stores shown.</a:t>
+              <a:t>Takeaway (off the slide): Lincoln has 6 top-3 finishes of 12. 8 stores make a top-3 list in both periods.Source: Qlik - Closed Repair Orders. Customer pay, by close date. Same-store, 33 stores (INEOS excluded, opened 2026). GMC Prescott body shop labor types excluded. Change is 2026 vs the same months of 2025, so seasonality cancels out. Stores ranked by percent change (points for parts GP %), so store size does not drive the ranking. CP gross = CP labor gross + CP parts gross. Top-3 finishes counted across six measures in each of two periods (Jan-Sep and Jul-Sep), 12 lists in all. Top 8 stores shown.</a:t>
             </a:r>
             <a:endParaRPr lang="en-US" dirty="0"/>
           </a:p>
@@ -776,7 +776,7 @@
           <a:p>
             <a:r>
               <a:rPr lang="en-US" dirty="0"/>
-              <a:t>Source: Qlik - Closed Repair Orders. Customer pay, by close date. Same-store, 33 stores (INEOS excluded, opened 2026). GMC Prescott body shop labor types excluded. Change is 2026 vs the same months of 2025, so seasonality cancels out. Stores ranked by percent change (points for parts GP %), so store size does not drive the ranking. CP gross = CP labor gross + CP parts gross.</a:t>
+              <a:t>Takeaway (off the slide): Lincoln leads both periods. Three stores are top five in both.Source: Qlik - Closed Repair Orders. Customer pay, by close date. Same-store, 33 stores (INEOS excluded, opened 2026). GMC Prescott body shop labor types excluded. Change is 2026 vs the same months of 2025, so seasonality cancels out. Stores ranked by percent change (points for parts GP %), so store size does not drive the ranking. CP gross = CP labor gross + CP parts gross.</a:t>
             </a:r>
             <a:endParaRPr lang="en-US" dirty="0"/>
           </a:p>
@@ -864,7 +864,7 @@
           <a:p>
             <a:r>
               <a:rPr lang="en-US" dirty="0"/>
-              <a:t>Source: Qlik - Closed Repair Orders. Customer pay, by close date. Same-store, 33 stores (INEOS excluded, opened 2026). GMC Prescott body shop labor types excluded. Change is 2026 vs the same months of 2025, so seasonality cancels out. Stores ranked by percent change (points for parts GP %), so store size does not drive the ranking. CP gross = CP labor gross + CP parts gross.</a:t>
+              <a:t>Takeaway (off the slide): Kia LV leads Jan–Sep; LR Reno leads the last 90 days. Three stores are top five in both.Source: Qlik - Closed Repair Orders. Customer pay, by close date. Same-store, 33 stores (INEOS excluded, opened 2026). GMC Prescott body shop labor types excluded. Change is 2026 vs the same months of 2025, so seasonality cancels out. Stores ranked by percent change (points for parts GP %), so store size does not drive the ranking. CP gross = CP labor gross + CP parts gross.</a:t>
             </a:r>
             <a:endParaRPr lang="en-US" dirty="0"/>
           </a:p>
@@ -952,7 +952,7 @@
           <a:p>
             <a:r>
               <a:rPr lang="en-US" dirty="0"/>
-              <a:t>Source: Qlik - Closed Repair Orders. Customer pay, by close date. Same-store, 33 stores (INEOS excluded, opened 2026). GMC Prescott body shop labor types excluded. Change is 2026 vs the same months of 2025, so seasonality cancels out. Stores ranked by percent change (points for parts GP %), so store size does not drive the ranking. CP gross = CP labor gross + CP parts gross.</a:t>
+              <a:t>Takeaway (off the slide): Hyundai St George leads both periods. Hyundai St George and Kia St George are top five in both.Source: Qlik - Closed Repair Orders. Customer pay, by close date. Same-store, 33 stores (INEOS excluded, opened 2026). GMC Prescott body shop labor types excluded. Change is 2026 vs the same months of 2025, so seasonality cancels out. Stores ranked by percent change (points for parts GP %), so store size does not drive the ranking. CP gross = CP labor gross + CP parts gross.</a:t>
             </a:r>
             <a:endParaRPr lang="en-US" dirty="0"/>
           </a:p>
@@ -1040,7 +1040,7 @@
           <a:p>
             <a:r>
               <a:rPr lang="en-US" dirty="0"/>
-              <a:t>Source: Qlik - Closed Repair Orders. Customer pay, by close date. Same-store, 33 stores (INEOS excluded, opened 2026). GMC Prescott body shop labor types excluded. Change is 2026 vs the same months of 2025, so seasonality cancels out. Stores ranked by percent change (points for parts GP %), so store size does not drive the ranking. CP gross = CP labor gross + CP parts gross.</a:t>
+              <a:t>Takeaway (off the slide): Honda Spokane leads Jan–Sep; Lincoln leads the last 90 days. Five stores are top five in both.Source: Qlik - Closed Repair Orders. Customer pay, by close date. Same-store, 33 stores (INEOS excluded, opened 2026). GMC Prescott body shop labor types excluded. Change is 2026 vs the same months of 2025, so seasonality cancels out. Stores ranked by percent change (points for parts GP %), so store size does not drive the ranking. CP gross = CP labor gross + CP parts gross.</a:t>
             </a:r>
             <a:endParaRPr lang="en-US" dirty="0"/>
           </a:p>
@@ -1128,7 +1128,7 @@
           <a:p>
             <a:r>
               <a:rPr lang="en-US" dirty="0"/>
-              <a:t>Source: Qlik - Closed Repair Orders. Customer pay, by close date. Same-store, 33 stores (INEOS excluded, opened 2026). GMC Prescott body shop labor types excluded. Change is 2026 vs the same months of 2025, so seasonality cancels out. Stores ranked by percent change (points for parts GP %), so store size does not drive the ranking. CP gross = CP labor gross + CP parts gross.</a:t>
+              <a:t>Takeaway (off the slide): Lincoln leads both periods. Three stores are top five in both.Source: Qlik - Closed Repair Orders. Customer pay, by close date. Same-store, 33 stores (INEOS excluded, opened 2026). GMC Prescott body shop labor types excluded. Change is 2026 vs the same months of 2025, so seasonality cancels out. Stores ranked by percent change (points for parts GP %), so store size does not drive the ranking. CP gross = CP labor gross + CP parts gross.</a:t>
             </a:r>
             <a:endParaRPr lang="en-US" dirty="0"/>
           </a:p>
@@ -1216,7 +1216,7 @@
           <a:p>
             <a:r>
               <a:rPr lang="en-US" dirty="0"/>
-              <a:t>Source: Qlik - Closed Repair Orders. Customer pay, by close date. Same-store, 33 stores (INEOS excluded, opened 2026). GMC Prescott body shop labor types excluded. Change is 2026 vs the same months of 2025, so seasonality cancels out. Stores ranked by percent change (points for parts GP %), so store size does not drive the ranking. CP gross = CP labor gross + CP parts gross.</a:t>
+              <a:t>Takeaway (off the slide): Acura leads both periods. Acura and Subaru Prescott are top five in both.Source: Qlik - Closed Repair Orders. Customer pay, by close date. Same-store, 33 stores (INEOS excluded, opened 2026). GMC Prescott body shop labor types excluded. Change is 2026 vs the same months of 2025, so seasonality cancels out. Stores ranked by percent change (points for parts GP %), so store size does not drive the ranking. CP gross = CP labor gross + CP parts gross.</a:t>
             </a:r>
             <a:endParaRPr lang="en-US" dirty="0"/>
           </a:p>
@@ -5262,65 +5262,6 @@
           </a:p>
         </p:txBody>
       </p:sp>
-      <p:sp>
-        <p:nvSpPr>
-          <p:cNvPr id="103" name="Shape 101"/>
-          <p:cNvSpPr/>
-          <p:nvPr/>
-        </p:nvSpPr>
-        <p:spPr>
-          <a:xfrm>
-            <a:off x="457200" y="6126480"/>
-            <a:ext cx="11274552" cy="371856"/>
-          </a:xfrm>
-          <a:prstGeom prst="rect">
-            <a:avLst/>
-          </a:prstGeom>
-          <a:solidFill>
-            <a:srgbClr val="E6F6EE"/>
-          </a:solidFill>
-          <a:ln/>
-        </p:spPr>
-      </p:sp>
-      <p:sp>
-        <p:nvSpPr>
-          <p:cNvPr id="104" name="Text 102"/>
-          <p:cNvSpPr txBox="1"/>
-          <p:nvPr/>
-        </p:nvSpPr>
-        <p:spPr>
-          <a:xfrm>
-            <a:off x="658368" y="6144768"/>
-            <a:ext cx="10927080" cy="335280"/>
-          </a:xfrm>
-          <a:prstGeom prst="rect">
-            <a:avLst/>
-          </a:prstGeom>
-          <a:noFill/>
-          <a:ln/>
-        </p:spPr>
-        <p:txBody>
-          <a:bodyPr wrap="square" lIns="0" tIns="0" rIns="0" bIns="0" rtlCol="0" anchor="ctr"/>
-          <a:lstStyle/>
-          <a:p>
-            <a:pPr indent="0" marL="0">
-              <a:buNone/>
-            </a:pPr>
-            <a:r>
-              <a:rPr lang="en-US" sz="1600" b="1" dirty="0">
-                <a:solidFill>
-                  <a:srgbClr val="0B7A4A"/>
-                </a:solidFill>
-                <a:latin typeface="Inter" pitchFamily="34" charset="0"/>
-                <a:ea typeface="Inter" pitchFamily="34" charset="-122"/>
-                <a:cs typeface="Inter" pitchFamily="34" charset="-120"/>
-              </a:rPr>
-              <a:t>Lincoln makes three of six lists; three stores make two.</a:t>
-            </a:r>
-            <a:endParaRPr lang="en-US" sz="1600" dirty="0"/>
-          </a:p>
-        </p:txBody>
-      </p:sp>
     </p:spTree>
   </p:cSld>
   <p:clrMapOvr>
@@ -9026,65 +8967,6 @@
           </a:p>
         </p:txBody>
       </p:sp>
-      <p:sp>
-        <p:nvSpPr>
-          <p:cNvPr id="103" name="Shape 101"/>
-          <p:cNvSpPr/>
-          <p:nvPr/>
-        </p:nvSpPr>
-        <p:spPr>
-          <a:xfrm>
-            <a:off x="457200" y="6126480"/>
-            <a:ext cx="11274552" cy="371856"/>
-          </a:xfrm>
-          <a:prstGeom prst="rect">
-            <a:avLst/>
-          </a:prstGeom>
-          <a:solidFill>
-            <a:srgbClr val="E6F6EE"/>
-          </a:solidFill>
-          <a:ln/>
-        </p:spPr>
-      </p:sp>
-      <p:sp>
-        <p:nvSpPr>
-          <p:cNvPr id="104" name="Text 102"/>
-          <p:cNvSpPr txBox="1"/>
-          <p:nvPr/>
-        </p:nvSpPr>
-        <p:spPr>
-          <a:xfrm>
-            <a:off x="658368" y="6144768"/>
-            <a:ext cx="10927080" cy="335280"/>
-          </a:xfrm>
-          <a:prstGeom prst="rect">
-            <a:avLst/>
-          </a:prstGeom>
-          <a:noFill/>
-          <a:ln/>
-        </p:spPr>
-        <p:txBody>
-          <a:bodyPr wrap="square" lIns="0" tIns="0" rIns="0" bIns="0" rtlCol="0" anchor="ctr"/>
-          <a:lstStyle/>
-          <a:p>
-            <a:pPr indent="0" marL="0">
-              <a:buNone/>
-            </a:pPr>
-            <a:r>
-              <a:rPr lang="en-US" sz="1600" b="1" dirty="0">
-                <a:solidFill>
-                  <a:srgbClr val="0B7A4A"/>
-                </a:solidFill>
-                <a:latin typeface="Inter" pitchFamily="34" charset="0"/>
-                <a:ea typeface="Inter" pitchFamily="34" charset="-122"/>
-                <a:cs typeface="Inter" pitchFamily="34" charset="-120"/>
-              </a:rPr>
-              <a:t>Lincoln and Kia St George each make three of six lists.</a:t>
-            </a:r>
-            <a:endParaRPr lang="en-US" sz="1600" dirty="0"/>
-          </a:p>
-        </p:txBody>
-      </p:sp>
     </p:spTree>
   </p:cSld>
   <p:clrMapOvr>
@@ -10840,65 +10722,6 @@
           </a:p>
         </p:txBody>
       </p:sp>
-      <p:sp>
-        <p:nvSpPr>
-          <p:cNvPr id="53" name="Shape 51"/>
-          <p:cNvSpPr/>
-          <p:nvPr/>
-        </p:nvSpPr>
-        <p:spPr>
-          <a:xfrm>
-            <a:off x="457200" y="6126480"/>
-            <a:ext cx="11274552" cy="371856"/>
-          </a:xfrm>
-          <a:prstGeom prst="rect">
-            <a:avLst/>
-          </a:prstGeom>
-          <a:solidFill>
-            <a:srgbClr val="E6F6EE"/>
-          </a:solidFill>
-          <a:ln/>
-        </p:spPr>
-      </p:sp>
-      <p:sp>
-        <p:nvSpPr>
-          <p:cNvPr id="54" name="Text 52"/>
-          <p:cNvSpPr txBox="1"/>
-          <p:nvPr/>
-        </p:nvSpPr>
-        <p:spPr>
-          <a:xfrm>
-            <a:off x="658368" y="6144768"/>
-            <a:ext cx="10927080" cy="335280"/>
-          </a:xfrm>
-          <a:prstGeom prst="rect">
-            <a:avLst/>
-          </a:prstGeom>
-          <a:noFill/>
-          <a:ln/>
-        </p:spPr>
-        <p:txBody>
-          <a:bodyPr wrap="square" lIns="0" tIns="0" rIns="0" bIns="0" rtlCol="0" anchor="ctr"/>
-          <a:lstStyle/>
-          <a:p>
-            <a:pPr indent="0" marL="0">
-              <a:buNone/>
-            </a:pPr>
-            <a:r>
-              <a:rPr lang="en-US" sz="1600" b="1" dirty="0">
-                <a:solidFill>
-                  <a:srgbClr val="0B7A4A"/>
-                </a:solidFill>
-                <a:latin typeface="Inter" pitchFamily="34" charset="0"/>
-                <a:ea typeface="Inter" pitchFamily="34" charset="-122"/>
-                <a:cs typeface="Inter" pitchFamily="34" charset="-120"/>
-              </a:rPr>
-              <a:t>Lincoln has 6 top-3 finishes of 12. 8 stores make a top-3 list in both periods.</a:t>
-            </a:r>
-            <a:endParaRPr lang="en-US" sz="1600" dirty="0"/>
-          </a:p>
-        </p:txBody>
-      </p:sp>
     </p:spTree>
   </p:cSld>
   <p:clrMapOvr>
@@ -13145,65 +12968,6 @@
           </a:p>
         </p:txBody>
       </p:sp>
-      <p:sp>
-        <p:nvSpPr>
-          <p:cNvPr id="69" name="Shape 67"/>
-          <p:cNvSpPr/>
-          <p:nvPr/>
-        </p:nvSpPr>
-        <p:spPr>
-          <a:xfrm>
-            <a:off x="457200" y="6126480"/>
-            <a:ext cx="11274552" cy="371856"/>
-          </a:xfrm>
-          <a:prstGeom prst="rect">
-            <a:avLst/>
-          </a:prstGeom>
-          <a:solidFill>
-            <a:srgbClr val="E6F6EE"/>
-          </a:solidFill>
-          <a:ln/>
-        </p:spPr>
-      </p:sp>
-      <p:sp>
-        <p:nvSpPr>
-          <p:cNvPr id="70" name="Text 68"/>
-          <p:cNvSpPr txBox="1"/>
-          <p:nvPr/>
-        </p:nvSpPr>
-        <p:spPr>
-          <a:xfrm>
-            <a:off x="658368" y="6144768"/>
-            <a:ext cx="10927080" cy="335280"/>
-          </a:xfrm>
-          <a:prstGeom prst="rect">
-            <a:avLst/>
-          </a:prstGeom>
-          <a:noFill/>
-          <a:ln/>
-        </p:spPr>
-        <p:txBody>
-          <a:bodyPr wrap="square" lIns="0" tIns="0" rIns="0" bIns="0" rtlCol="0" anchor="ctr"/>
-          <a:lstStyle/>
-          <a:p>
-            <a:pPr indent="0" marL="0">
-              <a:buNone/>
-            </a:pPr>
-            <a:r>
-              <a:rPr lang="en-US" sz="1600" b="1" dirty="0">
-                <a:solidFill>
-                  <a:srgbClr val="0B7A4A"/>
-                </a:solidFill>
-                <a:latin typeface="Inter" pitchFamily="34" charset="0"/>
-                <a:ea typeface="Inter" pitchFamily="34" charset="-122"/>
-                <a:cs typeface="Inter" pitchFamily="34" charset="-120"/>
-              </a:rPr>
-              <a:t>Lincoln leads both periods. Three stores are top five in both.</a:t>
-            </a:r>
-            <a:endParaRPr lang="en-US" sz="1600" dirty="0"/>
-          </a:p>
-        </p:txBody>
-      </p:sp>
     </p:spTree>
   </p:cSld>
   <p:clrMapOvr>
@@ -15450,65 +15214,6 @@
           </a:p>
         </p:txBody>
       </p:sp>
-      <p:sp>
-        <p:nvSpPr>
-          <p:cNvPr id="69" name="Shape 67"/>
-          <p:cNvSpPr/>
-          <p:nvPr/>
-        </p:nvSpPr>
-        <p:spPr>
-          <a:xfrm>
-            <a:off x="457200" y="6126480"/>
-            <a:ext cx="11274552" cy="371856"/>
-          </a:xfrm>
-          <a:prstGeom prst="rect">
-            <a:avLst/>
-          </a:prstGeom>
-          <a:solidFill>
-            <a:srgbClr val="E6F6EE"/>
-          </a:solidFill>
-          <a:ln/>
-        </p:spPr>
-      </p:sp>
-      <p:sp>
-        <p:nvSpPr>
-          <p:cNvPr id="70" name="Text 68"/>
-          <p:cNvSpPr txBox="1"/>
-          <p:nvPr/>
-        </p:nvSpPr>
-        <p:spPr>
-          <a:xfrm>
-            <a:off x="658368" y="6144768"/>
-            <a:ext cx="10927080" cy="335280"/>
-          </a:xfrm>
-          <a:prstGeom prst="rect">
-            <a:avLst/>
-          </a:prstGeom>
-          <a:noFill/>
-          <a:ln/>
-        </p:spPr>
-        <p:txBody>
-          <a:bodyPr wrap="square" lIns="0" tIns="0" rIns="0" bIns="0" rtlCol="0" anchor="ctr"/>
-          <a:lstStyle/>
-          <a:p>
-            <a:pPr indent="0" marL="0">
-              <a:buNone/>
-            </a:pPr>
-            <a:r>
-              <a:rPr lang="en-US" sz="1600" b="1" dirty="0">
-                <a:solidFill>
-                  <a:srgbClr val="0B7A4A"/>
-                </a:solidFill>
-                <a:latin typeface="Inter" pitchFamily="34" charset="0"/>
-                <a:ea typeface="Inter" pitchFamily="34" charset="-122"/>
-                <a:cs typeface="Inter" pitchFamily="34" charset="-120"/>
-              </a:rPr>
-              <a:t>Kia LV leads Jan–Sep; LR Reno leads the last 90 days. Three stores are top five in both.</a:t>
-            </a:r>
-            <a:endParaRPr lang="en-US" sz="1600" dirty="0"/>
-          </a:p>
-        </p:txBody>
-      </p:sp>
     </p:spTree>
   </p:cSld>
   <p:clrMapOvr>
@@ -17755,65 +17460,6 @@
           </a:p>
         </p:txBody>
       </p:sp>
-      <p:sp>
-        <p:nvSpPr>
-          <p:cNvPr id="69" name="Shape 67"/>
-          <p:cNvSpPr/>
-          <p:nvPr/>
-        </p:nvSpPr>
-        <p:spPr>
-          <a:xfrm>
-            <a:off x="457200" y="6126480"/>
-            <a:ext cx="11274552" cy="371856"/>
-          </a:xfrm>
-          <a:prstGeom prst="rect">
-            <a:avLst/>
-          </a:prstGeom>
-          <a:solidFill>
-            <a:srgbClr val="E6F6EE"/>
-          </a:solidFill>
-          <a:ln/>
-        </p:spPr>
-      </p:sp>
-      <p:sp>
-        <p:nvSpPr>
-          <p:cNvPr id="70" name="Text 68"/>
-          <p:cNvSpPr txBox="1"/>
-          <p:nvPr/>
-        </p:nvSpPr>
-        <p:spPr>
-          <a:xfrm>
-            <a:off x="658368" y="6144768"/>
-            <a:ext cx="10927080" cy="335280"/>
-          </a:xfrm>
-          <a:prstGeom prst="rect">
-            <a:avLst/>
-          </a:prstGeom>
-          <a:noFill/>
-          <a:ln/>
-        </p:spPr>
-        <p:txBody>
-          <a:bodyPr wrap="square" lIns="0" tIns="0" rIns="0" bIns="0" rtlCol="0" anchor="ctr"/>
-          <a:lstStyle/>
-          <a:p>
-            <a:pPr indent="0" marL="0">
-              <a:buNone/>
-            </a:pPr>
-            <a:r>
-              <a:rPr lang="en-US" sz="1600" b="1" dirty="0">
-                <a:solidFill>
-                  <a:srgbClr val="0B7A4A"/>
-                </a:solidFill>
-                <a:latin typeface="Inter" pitchFamily="34" charset="0"/>
-                <a:ea typeface="Inter" pitchFamily="34" charset="-122"/>
-                <a:cs typeface="Inter" pitchFamily="34" charset="-120"/>
-              </a:rPr>
-              <a:t>Hyundai St George leads both periods. Hyundai St George and Kia St George are top five in both.</a:t>
-            </a:r>
-            <a:endParaRPr lang="en-US" sz="1600" dirty="0"/>
-          </a:p>
-        </p:txBody>
-      </p:sp>
     </p:spTree>
   </p:cSld>
   <p:clrMapOvr>
@@ -20060,65 +19706,6 @@
           </a:p>
         </p:txBody>
       </p:sp>
-      <p:sp>
-        <p:nvSpPr>
-          <p:cNvPr id="69" name="Shape 67"/>
-          <p:cNvSpPr/>
-          <p:nvPr/>
-        </p:nvSpPr>
-        <p:spPr>
-          <a:xfrm>
-            <a:off x="457200" y="6126480"/>
-            <a:ext cx="11274552" cy="371856"/>
-          </a:xfrm>
-          <a:prstGeom prst="rect">
-            <a:avLst/>
-          </a:prstGeom>
-          <a:solidFill>
-            <a:srgbClr val="E6F6EE"/>
-          </a:solidFill>
-          <a:ln/>
-        </p:spPr>
-      </p:sp>
-      <p:sp>
-        <p:nvSpPr>
-          <p:cNvPr id="70" name="Text 68"/>
-          <p:cNvSpPr txBox="1"/>
-          <p:nvPr/>
-        </p:nvSpPr>
-        <p:spPr>
-          <a:xfrm>
-            <a:off x="658368" y="6144768"/>
-            <a:ext cx="10927080" cy="335280"/>
-          </a:xfrm>
-          <a:prstGeom prst="rect">
-            <a:avLst/>
-          </a:prstGeom>
-          <a:noFill/>
-          <a:ln/>
-        </p:spPr>
-        <p:txBody>
-          <a:bodyPr wrap="square" lIns="0" tIns="0" rIns="0" bIns="0" rtlCol="0" anchor="ctr"/>
-          <a:lstStyle/>
-          <a:p>
-            <a:pPr indent="0" marL="0">
-              <a:buNone/>
-            </a:pPr>
-            <a:r>
-              <a:rPr lang="en-US" sz="1600" b="1" dirty="0">
-                <a:solidFill>
-                  <a:srgbClr val="0B7A4A"/>
-                </a:solidFill>
-                <a:latin typeface="Inter" pitchFamily="34" charset="0"/>
-                <a:ea typeface="Inter" pitchFamily="34" charset="-122"/>
-                <a:cs typeface="Inter" pitchFamily="34" charset="-120"/>
-              </a:rPr>
-              <a:t>Honda Spokane leads Jan–Sep; Lincoln leads the last 90 days. Five stores are top five in both.</a:t>
-            </a:r>
-            <a:endParaRPr lang="en-US" sz="1600" dirty="0"/>
-          </a:p>
-        </p:txBody>
-      </p:sp>
     </p:spTree>
   </p:cSld>
   <p:clrMapOvr>
@@ -22365,65 +21952,6 @@
           </a:p>
         </p:txBody>
       </p:sp>
-      <p:sp>
-        <p:nvSpPr>
-          <p:cNvPr id="69" name="Shape 67"/>
-          <p:cNvSpPr/>
-          <p:nvPr/>
-        </p:nvSpPr>
-        <p:spPr>
-          <a:xfrm>
-            <a:off x="457200" y="6126480"/>
-            <a:ext cx="11274552" cy="371856"/>
-          </a:xfrm>
-          <a:prstGeom prst="rect">
-            <a:avLst/>
-          </a:prstGeom>
-          <a:solidFill>
-            <a:srgbClr val="E6F6EE"/>
-          </a:solidFill>
-          <a:ln/>
-        </p:spPr>
-      </p:sp>
-      <p:sp>
-        <p:nvSpPr>
-          <p:cNvPr id="70" name="Text 68"/>
-          <p:cNvSpPr txBox="1"/>
-          <p:nvPr/>
-        </p:nvSpPr>
-        <p:spPr>
-          <a:xfrm>
-            <a:off x="658368" y="6144768"/>
-            <a:ext cx="10927080" cy="335280"/>
-          </a:xfrm>
-          <a:prstGeom prst="rect">
-            <a:avLst/>
-          </a:prstGeom>
-          <a:noFill/>
-          <a:ln/>
-        </p:spPr>
-        <p:txBody>
-          <a:bodyPr wrap="square" lIns="0" tIns="0" rIns="0" bIns="0" rtlCol="0" anchor="ctr"/>
-          <a:lstStyle/>
-          <a:p>
-            <a:pPr indent="0" marL="0">
-              <a:buNone/>
-            </a:pPr>
-            <a:r>
-              <a:rPr lang="en-US" sz="1600" b="1" dirty="0">
-                <a:solidFill>
-                  <a:srgbClr val="0B7A4A"/>
-                </a:solidFill>
-                <a:latin typeface="Inter" pitchFamily="34" charset="0"/>
-                <a:ea typeface="Inter" pitchFamily="34" charset="-122"/>
-                <a:cs typeface="Inter" pitchFamily="34" charset="-120"/>
-              </a:rPr>
-              <a:t>Lincoln leads both periods. Three stores are top five in both.</a:t>
-            </a:r>
-            <a:endParaRPr lang="en-US" sz="1600" dirty="0"/>
-          </a:p>
-        </p:txBody>
-      </p:sp>
     </p:spTree>
   </p:cSld>
   <p:clrMapOvr>
@@ -24667,65 +24195,6 @@
               <a:t>+3.3 pts</a:t>
             </a:r>
             <a:endParaRPr lang="en-US" sz="1700" dirty="0"/>
-          </a:p>
-        </p:txBody>
-      </p:sp>
-      <p:sp>
-        <p:nvSpPr>
-          <p:cNvPr id="69" name="Shape 67"/>
-          <p:cNvSpPr/>
-          <p:nvPr/>
-        </p:nvSpPr>
-        <p:spPr>
-          <a:xfrm>
-            <a:off x="457200" y="6126480"/>
-            <a:ext cx="11274552" cy="371856"/>
-          </a:xfrm>
-          <a:prstGeom prst="rect">
-            <a:avLst/>
-          </a:prstGeom>
-          <a:solidFill>
-            <a:srgbClr val="E6F6EE"/>
-          </a:solidFill>
-          <a:ln/>
-        </p:spPr>
-      </p:sp>
-      <p:sp>
-        <p:nvSpPr>
-          <p:cNvPr id="70" name="Text 68"/>
-          <p:cNvSpPr txBox="1"/>
-          <p:nvPr/>
-        </p:nvSpPr>
-        <p:spPr>
-          <a:xfrm>
-            <a:off x="658368" y="6144768"/>
-            <a:ext cx="10927080" cy="335280"/>
-          </a:xfrm>
-          <a:prstGeom prst="rect">
-            <a:avLst/>
-          </a:prstGeom>
-          <a:noFill/>
-          <a:ln/>
-        </p:spPr>
-        <p:txBody>
-          <a:bodyPr wrap="square" lIns="0" tIns="0" rIns="0" bIns="0" rtlCol="0" anchor="ctr"/>
-          <a:lstStyle/>
-          <a:p>
-            <a:pPr indent="0" marL="0">
-              <a:buNone/>
-            </a:pPr>
-            <a:r>
-              <a:rPr lang="en-US" sz="1600" b="1" dirty="0">
-                <a:solidFill>
-                  <a:srgbClr val="0B7A4A"/>
-                </a:solidFill>
-                <a:latin typeface="Inter" pitchFamily="34" charset="0"/>
-                <a:ea typeface="Inter" pitchFamily="34" charset="-122"/>
-                <a:cs typeface="Inter" pitchFamily="34" charset="-120"/>
-              </a:rPr>
-              <a:t>Acura leads both periods. Acura and Subaru Prescott are top five in both.</a:t>
-            </a:r>
-            <a:endParaRPr lang="en-US" sz="1600" dirty="0"/>
           </a:p>
         </p:txBody>
       </p:sp>

--- a/day2-deck/decks/Most Improved - Review.pptx
+++ b/day2-deck/decks/Most Improved - Review.pptx
@@ -510,7 +510,7 @@
           <a:p>
             <a:r>
               <a:rPr lang="en-US" dirty="0"/>
-              <a:t>Takeaway (off the slide): Lincoln makes three of six lists; three stores make two.Source: Qlik - Closed Repair Orders. Customer pay, by close date. Same-store, 33 stores (INEOS excluded, opened 2026). GMC Prescott body shop labor types excluded. Change is 2026 vs the same months of 2025, so seasonality cancels out. Stores ranked by percent change (points for parts GP %), so store size does not drive the ranking. CP gross = CP labor gross + CP parts gross. Period: Jan–Sep 2026 vs Jan–Sep 2025. Stores with under 50 CP ROs in the base period not ranked (none were excluded).
+              <a:t>Takeaway with the store call-outs (off the slide): Lincoln makes three of six lists; three stores make two.Source: Qlik - Closed Repair Orders. Customer pay, by close date. Same-store, 33 stores (INEOS excluded, opened 2026). GMC Prescott body shop labor types excluded. Change is 2026 vs the same months of 2025, so seasonality cancels out. Stores ranked by percent change (points for parts GP %), so store size does not drive the ranking. CP gross = CP labor gross + CP parts gross. Period: Jan–Sep 2026 vs Jan–Sep 2025. Stores with under 50 CP ROs in the base period not ranked (none were excluded).
 Review note: percent change rewards a store coming off a weak base. The before → after values are on the card so the room sees the starting point.</a:t>
             </a:r>
             <a:endParaRPr lang="en-US" dirty="0"/>
@@ -599,7 +599,7 @@
           <a:p>
             <a:r>
               <a:rPr lang="en-US" dirty="0"/>
-              <a:t>Takeaway (off the slide): Lincoln and Kia St George each make three of six lists.Source: Qlik - Closed Repair Orders. Customer pay, by close date. Same-store, 33 stores (INEOS excluded, opened 2026). GMC Prescott body shop labor types excluded. Change is 2026 vs the same months of 2025, so seasonality cancels out. Stores ranked by percent change (points for parts GP %), so store size does not drive the ranking. CP gross = CP labor gross + CP parts gross. Period: Jul–Sep 2026 vs Jul–Sep 2025. Stores with under 50 CP ROs in the base period not ranked (none were excluded).
+              <a:t>Takeaway with the store call-outs (off the slide): Lincoln and Kia St George each make three of six lists.Source: Qlik - Closed Repair Orders. Customer pay, by close date. Same-store, 33 stores (INEOS excluded, opened 2026). GMC Prescott body shop labor types excluded. Change is 2026 vs the same months of 2025, so seasonality cancels out. Stores ranked by percent change (points for parts GP %), so store size does not drive the ranking. CP gross = CP labor gross + CP parts gross. Period: Jul–Sep 2026 vs Jul–Sep 2025. Stores with under 50 CP ROs in the base period not ranked (none were excluded).
 Review note: percent change rewards a store coming off a weak base. The before → after values are on the card so the room sees the starting point.</a:t>
             </a:r>
             <a:endParaRPr lang="en-US" dirty="0"/>
@@ -688,7 +688,7 @@
           <a:p>
             <a:r>
               <a:rPr lang="en-US" dirty="0"/>
-              <a:t>Takeaway (off the slide): Lincoln has 6 top-3 finishes of 12. 8 stores make a top-3 list in both periods.Source: Qlik - Closed Repair Orders. Customer pay, by close date. Same-store, 33 stores (INEOS excluded, opened 2026). GMC Prescott body shop labor types excluded. Change is 2026 vs the same months of 2025, so seasonality cancels out. Stores ranked by percent change (points for parts GP %), so store size does not drive the ranking. CP gross = CP labor gross + CP parts gross. Top-3 finishes counted across six measures in each of two periods (Jan-Sep and Jul-Sep), 12 lists in all. Top 8 stores shown.</a:t>
+              <a:t>Takeaway with the store call-outs (off the slide): Lincoln has 6 top-3 finishes of 12. 8 stores make a top-3 list in both periods.Source: Qlik - Closed Repair Orders. Customer pay, by close date. Same-store, 33 stores (INEOS excluded, opened 2026). GMC Prescott body shop labor types excluded. Change is 2026 vs the same months of 2025, so seasonality cancels out. Stores ranked by percent change (points for parts GP %), so store size does not drive the ranking. CP gross = CP labor gross + CP parts gross. Top-3 finishes counted across six measures in each of two periods (Jan-Sep and Jul-Sep), 12 lists in all. Top 8 stores shown.</a:t>
             </a:r>
             <a:endParaRPr lang="en-US" dirty="0"/>
           </a:p>
@@ -776,7 +776,7 @@
           <a:p>
             <a:r>
               <a:rPr lang="en-US" dirty="0"/>
-              <a:t>Takeaway (off the slide): Lincoln leads both periods. Three stores are top five in both.Source: Qlik - Closed Repair Orders. Customer pay, by close date. Same-store, 33 stores (INEOS excluded, opened 2026). GMC Prescott body shop labor types excluded. Change is 2026 vs the same months of 2025, so seasonality cancels out. Stores ranked by percent change (points for parts GP %), so store size does not drive the ranking. CP gross = CP labor gross + CP parts gross.</a:t>
+              <a:t>Takeaway with the store call-outs (off the slide): Lincoln leads both periods. Three stores are top five in both.Source: Qlik - Closed Repair Orders. Customer pay, by close date. Same-store, 33 stores (INEOS excluded, opened 2026). GMC Prescott body shop labor types excluded. Change is 2026 vs the same months of 2025, so seasonality cancels out. Stores ranked by percent change (points for parts GP %), so store size does not drive the ranking. CP gross = CP labor gross + CP parts gross.</a:t>
             </a:r>
             <a:endParaRPr lang="en-US" dirty="0"/>
           </a:p>
@@ -864,7 +864,7 @@
           <a:p>
             <a:r>
               <a:rPr lang="en-US" dirty="0"/>
-              <a:t>Takeaway (off the slide): Kia LV leads Jan–Sep; LR Reno leads the last 90 days. Three stores are top five in both.Source: Qlik - Closed Repair Orders. Customer pay, by close date. Same-store, 33 stores (INEOS excluded, opened 2026). GMC Prescott body shop labor types excluded. Change is 2026 vs the same months of 2025, so seasonality cancels out. Stores ranked by percent change (points for parts GP %), so store size does not drive the ranking. CP gross = CP labor gross + CP parts gross.</a:t>
+              <a:t>Takeaway with the store call-outs (off the slide): Kia LV leads Jan–Sep; LR Reno leads the last 90 days. Three stores are top five in both.Source: Qlik - Closed Repair Orders. Customer pay, by close date. Same-store, 33 stores (INEOS excluded, opened 2026). GMC Prescott body shop labor types excluded. Change is 2026 vs the same months of 2025, so seasonality cancels out. Stores ranked by percent change (points for parts GP %), so store size does not drive the ranking. CP gross = CP labor gross + CP parts gross.</a:t>
             </a:r>
             <a:endParaRPr lang="en-US" dirty="0"/>
           </a:p>
@@ -952,7 +952,7 @@
           <a:p>
             <a:r>
               <a:rPr lang="en-US" dirty="0"/>
-              <a:t>Takeaway (off the slide): Hyundai St George leads both periods. Hyundai St George and Kia St George are top five in both.Source: Qlik - Closed Repair Orders. Customer pay, by close date. Same-store, 33 stores (INEOS excluded, opened 2026). GMC Prescott body shop labor types excluded. Change is 2026 vs the same months of 2025, so seasonality cancels out. Stores ranked by percent change (points for parts GP %), so store size does not drive the ranking. CP gross = CP labor gross + CP parts gross.</a:t>
+              <a:t>Takeaway with the store call-outs (off the slide): Hyundai St George leads both periods. Hyundai St George and Kia St George are top five in both.Source: Qlik - Closed Repair Orders. Customer pay, by close date. Same-store, 33 stores (INEOS excluded, opened 2026). GMC Prescott body shop labor types excluded. Change is 2026 vs the same months of 2025, so seasonality cancels out. Stores ranked by percent change (points for parts GP %), so store size does not drive the ranking. CP gross = CP labor gross + CP parts gross.</a:t>
             </a:r>
             <a:endParaRPr lang="en-US" dirty="0"/>
           </a:p>
@@ -1040,7 +1040,7 @@
           <a:p>
             <a:r>
               <a:rPr lang="en-US" dirty="0"/>
-              <a:t>Takeaway (off the slide): Honda Spokane leads Jan–Sep; Lincoln leads the last 90 days. Five stores are top five in both.Source: Qlik - Closed Repair Orders. Customer pay, by close date. Same-store, 33 stores (INEOS excluded, opened 2026). GMC Prescott body shop labor types excluded. Change is 2026 vs the same months of 2025, so seasonality cancels out. Stores ranked by percent change (points for parts GP %), so store size does not drive the ranking. CP gross = CP labor gross + CP parts gross.</a:t>
+              <a:t>Takeaway with the store call-outs (off the slide): Honda Spokane leads Jan–Sep; Lincoln leads the last 90 days. Five stores are top five in both.Source: Qlik - Closed Repair Orders. Customer pay, by close date. Same-store, 33 stores (INEOS excluded, opened 2026). GMC Prescott body shop labor types excluded. Change is 2026 vs the same months of 2025, so seasonality cancels out. Stores ranked by percent change (points for parts GP %), so store size does not drive the ranking. CP gross = CP labor gross + CP parts gross.</a:t>
             </a:r>
             <a:endParaRPr lang="en-US" dirty="0"/>
           </a:p>
@@ -1128,7 +1128,7 @@
           <a:p>
             <a:r>
               <a:rPr lang="en-US" dirty="0"/>
-              <a:t>Takeaway (off the slide): Lincoln leads both periods. Three stores are top five in both.Source: Qlik - Closed Repair Orders. Customer pay, by close date. Same-store, 33 stores (INEOS excluded, opened 2026). GMC Prescott body shop labor types excluded. Change is 2026 vs the same months of 2025, so seasonality cancels out. Stores ranked by percent change (points for parts GP %), so store size does not drive the ranking. CP gross = CP labor gross + CP parts gross.</a:t>
+              <a:t>Takeaway with the store call-outs (off the slide): Lincoln leads both periods. Three stores are top five in both.Source: Qlik - Closed Repair Orders. Customer pay, by close date. Same-store, 33 stores (INEOS excluded, opened 2026). GMC Prescott body shop labor types excluded. Change is 2026 vs the same months of 2025, so seasonality cancels out. Stores ranked by percent change (points for parts GP %), so store size does not drive the ranking. CP gross = CP labor gross + CP parts gross.</a:t>
             </a:r>
             <a:endParaRPr lang="en-US" dirty="0"/>
           </a:p>
@@ -1216,7 +1216,7 @@
           <a:p>
             <a:r>
               <a:rPr lang="en-US" dirty="0"/>
-              <a:t>Takeaway (off the slide): Acura leads both periods. Acura and Subaru Prescott are top five in both.Source: Qlik - Closed Repair Orders. Customer pay, by close date. Same-store, 33 stores (INEOS excluded, opened 2026). GMC Prescott body shop labor types excluded. Change is 2026 vs the same months of 2025, so seasonality cancels out. Stores ranked by percent change (points for parts GP %), so store size does not drive the ranking. CP gross = CP labor gross + CP parts gross.</a:t>
+              <a:t>Takeaway with the store call-outs (off the slide): Acura leads both periods. Acura and Subaru Prescott are top five in both.Source: Qlik - Closed Repair Orders. Customer pay, by close date. Same-store, 33 stores (INEOS excluded, opened 2026). GMC Prescott body shop labor types excluded. Change is 2026 vs the same months of 2025, so seasonality cancels out. Stores ranked by percent change (points for parts GP %), so store size does not drive the ranking. CP gross = CP labor gross + CP parts gross.</a:t>
             </a:r>
             <a:endParaRPr lang="en-US" dirty="0"/>
           </a:p>
@@ -5262,6 +5262,65 @@
           </a:p>
         </p:txBody>
       </p:sp>
+      <p:sp>
+        <p:nvSpPr>
+          <p:cNvPr id="104" name="Shape 101"/>
+          <p:cNvSpPr/>
+          <p:nvPr/>
+        </p:nvSpPr>
+        <p:spPr>
+          <a:xfrm>
+            <a:off x="457200" y="6126480"/>
+            <a:ext cx="11274552" cy="371856"/>
+          </a:xfrm>
+          <a:prstGeom prst="rect">
+            <a:avLst/>
+          </a:prstGeom>
+          <a:solidFill>
+            <a:srgbClr val="E6F6EE"/>
+          </a:solidFill>
+          <a:ln/>
+        </p:spPr>
+      </p:sp>
+      <p:sp>
+        <p:nvSpPr>
+          <p:cNvPr id="105" name="Text 102"/>
+          <p:cNvSpPr txBox="1"/>
+          <p:nvPr/>
+        </p:nvSpPr>
+        <p:spPr>
+          <a:xfrm>
+            <a:off x="658368" y="6144768"/>
+            <a:ext cx="10927080" cy="335280"/>
+          </a:xfrm>
+          <a:prstGeom prst="rect">
+            <a:avLst/>
+          </a:prstGeom>
+          <a:noFill/>
+          <a:ln/>
+        </p:spPr>
+        <p:txBody>
+          <a:bodyPr wrap="square" lIns="0" tIns="0" rIns="0" bIns="0" rtlCol="0" anchor="ctr"/>
+          <a:lstStyle/>
+          <a:p>
+            <a:pPr indent="0" marL="0">
+              <a:buNone/>
+            </a:pPr>
+            <a:r>
+              <a:rPr lang="en-US" sz="1600" b="1" dirty="0">
+                <a:solidFill>
+                  <a:srgbClr val="0B7A4A"/>
+                </a:solidFill>
+                <a:latin typeface="Inter" pitchFamily="34" charset="0"/>
+                <a:ea typeface="Inter" pitchFamily="34" charset="-122"/>
+                <a:cs typeface="Inter" pitchFamily="34" charset="-120"/>
+              </a:rPr>
+              <a:t>Three stores make two.</a:t>
+            </a:r>
+            <a:endParaRPr lang="en-US" sz="1600" dirty="0"/>
+          </a:p>
+        </p:txBody>
+      </p:sp>
     </p:spTree>
   </p:cSld>
   <p:clrMapOvr>
@@ -10722,6 +10781,65 @@
           </a:p>
         </p:txBody>
       </p:sp>
+      <p:sp>
+        <p:nvSpPr>
+          <p:cNvPr id="54" name="Shape 51"/>
+          <p:cNvSpPr/>
+          <p:nvPr/>
+        </p:nvSpPr>
+        <p:spPr>
+          <a:xfrm>
+            <a:off x="457200" y="6126480"/>
+            <a:ext cx="11274552" cy="371856"/>
+          </a:xfrm>
+          <a:prstGeom prst="rect">
+            <a:avLst/>
+          </a:prstGeom>
+          <a:solidFill>
+            <a:srgbClr val="E6F6EE"/>
+          </a:solidFill>
+          <a:ln/>
+        </p:spPr>
+      </p:sp>
+      <p:sp>
+        <p:nvSpPr>
+          <p:cNvPr id="55" name="Text 52"/>
+          <p:cNvSpPr txBox="1"/>
+          <p:nvPr/>
+        </p:nvSpPr>
+        <p:spPr>
+          <a:xfrm>
+            <a:off x="658368" y="6144768"/>
+            <a:ext cx="10927080" cy="335280"/>
+          </a:xfrm>
+          <a:prstGeom prst="rect">
+            <a:avLst/>
+          </a:prstGeom>
+          <a:noFill/>
+          <a:ln/>
+        </p:spPr>
+        <p:txBody>
+          <a:bodyPr wrap="square" lIns="0" tIns="0" rIns="0" bIns="0" rtlCol="0" anchor="ctr"/>
+          <a:lstStyle/>
+          <a:p>
+            <a:pPr indent="0" marL="0">
+              <a:buNone/>
+            </a:pPr>
+            <a:r>
+              <a:rPr lang="en-US" sz="1600" b="1" dirty="0">
+                <a:solidFill>
+                  <a:srgbClr val="0B7A4A"/>
+                </a:solidFill>
+                <a:latin typeface="Inter" pitchFamily="34" charset="0"/>
+                <a:ea typeface="Inter" pitchFamily="34" charset="-122"/>
+                <a:cs typeface="Inter" pitchFamily="34" charset="-120"/>
+              </a:rPr>
+              <a:t>8 stores make a top-3 list in both periods.</a:t>
+            </a:r>
+            <a:endParaRPr lang="en-US" sz="1600" dirty="0"/>
+          </a:p>
+        </p:txBody>
+      </p:sp>
     </p:spTree>
   </p:cSld>
   <p:clrMapOvr>
@@ -12968,6 +13086,65 @@
           </a:p>
         </p:txBody>
       </p:sp>
+      <p:sp>
+        <p:nvSpPr>
+          <p:cNvPr id="70" name="Shape 67"/>
+          <p:cNvSpPr/>
+          <p:nvPr/>
+        </p:nvSpPr>
+        <p:spPr>
+          <a:xfrm>
+            <a:off x="457200" y="6126480"/>
+            <a:ext cx="11274552" cy="371856"/>
+          </a:xfrm>
+          <a:prstGeom prst="rect">
+            <a:avLst/>
+          </a:prstGeom>
+          <a:solidFill>
+            <a:srgbClr val="E6F6EE"/>
+          </a:solidFill>
+          <a:ln/>
+        </p:spPr>
+      </p:sp>
+      <p:sp>
+        <p:nvSpPr>
+          <p:cNvPr id="71" name="Text 68"/>
+          <p:cNvSpPr txBox="1"/>
+          <p:nvPr/>
+        </p:nvSpPr>
+        <p:spPr>
+          <a:xfrm>
+            <a:off x="658368" y="6144768"/>
+            <a:ext cx="10927080" cy="335280"/>
+          </a:xfrm>
+          <a:prstGeom prst="rect">
+            <a:avLst/>
+          </a:prstGeom>
+          <a:noFill/>
+          <a:ln/>
+        </p:spPr>
+        <p:txBody>
+          <a:bodyPr wrap="square" lIns="0" tIns="0" rIns="0" bIns="0" rtlCol="0" anchor="ctr"/>
+          <a:lstStyle/>
+          <a:p>
+            <a:pPr indent="0" marL="0">
+              <a:buNone/>
+            </a:pPr>
+            <a:r>
+              <a:rPr lang="en-US" sz="1600" b="1" dirty="0">
+                <a:solidFill>
+                  <a:srgbClr val="0B7A4A"/>
+                </a:solidFill>
+                <a:latin typeface="Inter" pitchFamily="34" charset="0"/>
+                <a:ea typeface="Inter" pitchFamily="34" charset="-122"/>
+                <a:cs typeface="Inter" pitchFamily="34" charset="-120"/>
+              </a:rPr>
+              <a:t>Three stores are top five in both.</a:t>
+            </a:r>
+            <a:endParaRPr lang="en-US" sz="1600" dirty="0"/>
+          </a:p>
+        </p:txBody>
+      </p:sp>
     </p:spTree>
   </p:cSld>
   <p:clrMapOvr>
@@ -15214,6 +15391,65 @@
           </a:p>
         </p:txBody>
       </p:sp>
+      <p:sp>
+        <p:nvSpPr>
+          <p:cNvPr id="70" name="Shape 67"/>
+          <p:cNvSpPr/>
+          <p:nvPr/>
+        </p:nvSpPr>
+        <p:spPr>
+          <a:xfrm>
+            <a:off x="457200" y="6126480"/>
+            <a:ext cx="11274552" cy="371856"/>
+          </a:xfrm>
+          <a:prstGeom prst="rect">
+            <a:avLst/>
+          </a:prstGeom>
+          <a:solidFill>
+            <a:srgbClr val="E6F6EE"/>
+          </a:solidFill>
+          <a:ln/>
+        </p:spPr>
+      </p:sp>
+      <p:sp>
+        <p:nvSpPr>
+          <p:cNvPr id="71" name="Text 68"/>
+          <p:cNvSpPr txBox="1"/>
+          <p:nvPr/>
+        </p:nvSpPr>
+        <p:spPr>
+          <a:xfrm>
+            <a:off x="658368" y="6144768"/>
+            <a:ext cx="10927080" cy="335280"/>
+          </a:xfrm>
+          <a:prstGeom prst="rect">
+            <a:avLst/>
+          </a:prstGeom>
+          <a:noFill/>
+          <a:ln/>
+        </p:spPr>
+        <p:txBody>
+          <a:bodyPr wrap="square" lIns="0" tIns="0" rIns="0" bIns="0" rtlCol="0" anchor="ctr"/>
+          <a:lstStyle/>
+          <a:p>
+            <a:pPr indent="0" marL="0">
+              <a:buNone/>
+            </a:pPr>
+            <a:r>
+              <a:rPr lang="en-US" sz="1600" b="1" dirty="0">
+                <a:solidFill>
+                  <a:srgbClr val="0B7A4A"/>
+                </a:solidFill>
+                <a:latin typeface="Inter" pitchFamily="34" charset="0"/>
+                <a:ea typeface="Inter" pitchFamily="34" charset="-122"/>
+                <a:cs typeface="Inter" pitchFamily="34" charset="-120"/>
+              </a:rPr>
+              <a:t>Three stores are top five in both.</a:t>
+            </a:r>
+            <a:endParaRPr lang="en-US" sz="1600" dirty="0"/>
+          </a:p>
+        </p:txBody>
+      </p:sp>
     </p:spTree>
   </p:cSld>
   <p:clrMapOvr>
@@ -19706,6 +19942,65 @@
           </a:p>
         </p:txBody>
       </p:sp>
+      <p:sp>
+        <p:nvSpPr>
+          <p:cNvPr id="70" name="Shape 67"/>
+          <p:cNvSpPr/>
+          <p:nvPr/>
+        </p:nvSpPr>
+        <p:spPr>
+          <a:xfrm>
+            <a:off x="457200" y="6126480"/>
+            <a:ext cx="11274552" cy="371856"/>
+          </a:xfrm>
+          <a:prstGeom prst="rect">
+            <a:avLst/>
+          </a:prstGeom>
+          <a:solidFill>
+            <a:srgbClr val="E6F6EE"/>
+          </a:solidFill>
+          <a:ln/>
+        </p:spPr>
+      </p:sp>
+      <p:sp>
+        <p:nvSpPr>
+          <p:cNvPr id="71" name="Text 68"/>
+          <p:cNvSpPr txBox="1"/>
+          <p:nvPr/>
+        </p:nvSpPr>
+        <p:spPr>
+          <a:xfrm>
+            <a:off x="658368" y="6144768"/>
+            <a:ext cx="10927080" cy="335280"/>
+          </a:xfrm>
+          <a:prstGeom prst="rect">
+            <a:avLst/>
+          </a:prstGeom>
+          <a:noFill/>
+          <a:ln/>
+        </p:spPr>
+        <p:txBody>
+          <a:bodyPr wrap="square" lIns="0" tIns="0" rIns="0" bIns="0" rtlCol="0" anchor="ctr"/>
+          <a:lstStyle/>
+          <a:p>
+            <a:pPr indent="0" marL="0">
+              <a:buNone/>
+            </a:pPr>
+            <a:r>
+              <a:rPr lang="en-US" sz="1600" b="1" dirty="0">
+                <a:solidFill>
+                  <a:srgbClr val="0B7A4A"/>
+                </a:solidFill>
+                <a:latin typeface="Inter" pitchFamily="34" charset="0"/>
+                <a:ea typeface="Inter" pitchFamily="34" charset="-122"/>
+                <a:cs typeface="Inter" pitchFamily="34" charset="-120"/>
+              </a:rPr>
+              <a:t>Five stores are top five in both.</a:t>
+            </a:r>
+            <a:endParaRPr lang="en-US" sz="1600" dirty="0"/>
+          </a:p>
+        </p:txBody>
+      </p:sp>
     </p:spTree>
   </p:cSld>
   <p:clrMapOvr>
@@ -21949,6 +22244,65 @@
               <a:t>+18.7%</a:t>
             </a:r>
             <a:endParaRPr lang="en-US" sz="1700" dirty="0"/>
+          </a:p>
+        </p:txBody>
+      </p:sp>
+      <p:sp>
+        <p:nvSpPr>
+          <p:cNvPr id="70" name="Shape 67"/>
+          <p:cNvSpPr/>
+          <p:nvPr/>
+        </p:nvSpPr>
+        <p:spPr>
+          <a:xfrm>
+            <a:off x="457200" y="6126480"/>
+            <a:ext cx="11274552" cy="371856"/>
+          </a:xfrm>
+          <a:prstGeom prst="rect">
+            <a:avLst/>
+          </a:prstGeom>
+          <a:solidFill>
+            <a:srgbClr val="E6F6EE"/>
+          </a:solidFill>
+          <a:ln/>
+        </p:spPr>
+      </p:sp>
+      <p:sp>
+        <p:nvSpPr>
+          <p:cNvPr id="71" name="Text 68"/>
+          <p:cNvSpPr txBox="1"/>
+          <p:nvPr/>
+        </p:nvSpPr>
+        <p:spPr>
+          <a:xfrm>
+            <a:off x="658368" y="6144768"/>
+            <a:ext cx="10927080" cy="335280"/>
+          </a:xfrm>
+          <a:prstGeom prst="rect">
+            <a:avLst/>
+          </a:prstGeom>
+          <a:noFill/>
+          <a:ln/>
+        </p:spPr>
+        <p:txBody>
+          <a:bodyPr wrap="square" lIns="0" tIns="0" rIns="0" bIns="0" rtlCol="0" anchor="ctr"/>
+          <a:lstStyle/>
+          <a:p>
+            <a:pPr indent="0" marL="0">
+              <a:buNone/>
+            </a:pPr>
+            <a:r>
+              <a:rPr lang="en-US" sz="1600" b="1" dirty="0">
+                <a:solidFill>
+                  <a:srgbClr val="0B7A4A"/>
+                </a:solidFill>
+                <a:latin typeface="Inter" pitchFamily="34" charset="0"/>
+                <a:ea typeface="Inter" pitchFamily="34" charset="-122"/>
+                <a:cs typeface="Inter" pitchFamily="34" charset="-120"/>
+              </a:rPr>
+              <a:t>Three stores are top five in both.</a:t>
+            </a:r>
+            <a:endParaRPr lang="en-US" sz="1600" dirty="0"/>
           </a:p>
         </p:txBody>
       </p:sp>
